--- a/presentations/b06-data-platform/B06_Data_Platform.pptx
+++ b/presentations/b06-data-platform/B06_Data_Platform.pptx
@@ -119,26 +119,26 @@
   <p:extLst>
     <p:ext uri="{521415D9-36F7-43E2-AB2F-B90AF26B5E84}">
       <p14:sectionLst xmlns:p14="http://schemas.microsoft.com/office/powerpoint/2010/main">
-        <p14:section name="Why the database" id="{a7364e95-176e-8085-7c8c-f2be0cab5ef0}">
+        <p14:section name="Why the database" id="{577c0d89-de8c-4ac7-e0be-d6e4f0076440}">
           <p14:sldIdLst>
             <p14:sldId id="256"/>
             <p14:sldId id="257"/>
             <p14:sldId id="258"/>
           </p14:sldIdLst>
         </p14:section>
-        <p14:section name="What changes" id="{d964b4ef-0832-fce0-3371-e5694cfbf612}">
+        <p14:section name="What changes" id="{f3e21540-3526-d82f-95d2-fa40acc66253}">
           <p14:sldIdLst>
             <p14:sldId id="259"/>
             <p14:sldId id="260"/>
             <p14:sldId id="261"/>
           </p14:sldIdLst>
         </p14:section>
-        <p14:section name="Who owns it" id="{f675aa28-f9de-e94e-366a-3c477e3db0f4}">
+        <p14:section name="Who owns it" id="{e1782838-554d-3e94-3f9a-3cceee7c887c}">
           <p14:sldIdLst>
             <p14:sldId id="262"/>
           </p14:sldIdLst>
         </p14:section>
-        <p14:section name="How to do it" id="{d99773a1-dc55-f338-6586-b90c897e1a33}">
+        <p14:section name="How to do it" id="{4b7c7aac-7979-23bf-f0fd-305f71ceedf5}">
           <p14:sldIdLst>
             <p14:sldId id="263"/>
             <p14:sldId id="264"/>
@@ -146,7 +146,7 @@
             <p14:sldId id="266"/>
           </p14:sldIdLst>
         </p14:section>
-        <p14:section name="Backup" id="{f2a5dadb-3efb-affe-b916-84224a38f643}">
+        <p14:section name="Backup" id="{aa201502-95be-db09-5adc-a7e7220b5b45}">
           <p14:sldIdLst>
             <p14:sldId id="267"/>
             <p14:sldId id="268"/>
@@ -556,7 +556,7 @@
           <a:p>
             <a:r>
               <a:rPr lang="en-US" dirty="0"/>
-              <a:t>[0:00–0:26]  This briefing comes from Book 06 of the Modernization Workbook: the SQL Server estate's move from Windows Authentication to cloud identity.
+              <a:t>[0:00–0:26]  This briefing comes from Book 06 of the Federal Modernization Workbook: the SQL Server estate's move from Windows Authentication to cloud identity.
 Every identity program eventually reaches the database, and the database is where it finds the most Windows authentication still in use. I'll take it through why that is, what replaces it, who owns the work, and how to do it, from the estate inventory to a closure condition you can keep proving.
 Workbook: Book 06, index.</a:t>
             </a:r>
@@ -1954,7 +1954,7 @@
                   <a:schemeClr val="accent5"/>
                 </a:solidFill>
               </a:rPr>
-              <a:t>Modernization Workbook  ·  Book 06 Data Platform: SQL Server Identity</a:t>
+              <a:t>Federal Modernization Workbook  ·  Book 06 Data Platform: SQL Server Identity</a:t>
             </a:r>
             <a:endParaRPr lang="en-US" sz="1000" dirty="0"/>
           </a:p>
@@ -2435,7 +2435,90 @@
       </p:sp>
       <p:sp>
         <p:nvSpPr>
-          <p:cNvPr id="4" name="Agenda line"/>
+          <p:cNvPr id="4" name="Presenter"/>
+          <p:cNvSpPr txBox="1"/>
+          <p:nvPr/>
+        </p:nvSpPr>
+        <p:spPr>
+          <a:xfrm>
+            <a:off x="731520" y="5897880"/>
+            <a:ext cx="6858000" cy="365760"/>
+          </a:xfrm>
+          <a:prstGeom prst="rect">
+            <a:avLst/>
+          </a:prstGeom>
+          <a:noFill/>
+          <a:ln/>
+        </p:spPr>
+        <p:txBody>
+          <a:bodyPr wrap="square" lIns="0" tIns="0" rIns="0" bIns="0" rtlCol="0" anchor="ctr"/>
+          <a:lstStyle/>
+          <a:p>
+            <a:pPr indent="0" marL="0">
+              <a:buNone/>
+            </a:pPr>
+            <a:r>
+              <a:rPr lang="en-US" sz="1600" dirty="0">
+                <a:solidFill>
+                  <a:srgbClr val="64748B"/>
+                </a:solidFill>
+              </a:rPr>
+              <a:t>Presented by  </a:t>
+            </a:r>
+            <a:pPr indent="0" marL="0">
+              <a:buNone/>
+            </a:pPr>
+            <a:r>
+              <a:rPr lang="en-US" sz="1600" b="1" dirty="0">
+                <a:solidFill>
+                  <a:srgbClr val="1F2A44"/>
+                </a:solidFill>
+              </a:rPr>
+              <a:t>Michael F. Stratton</a:t>
+            </a:r>
+            <a:endParaRPr lang="en-US" sz="1600" dirty="0"/>
+          </a:p>
+        </p:txBody>
+      </p:sp>
+      <p:sp>
+        <p:nvSpPr>
+          <p:cNvPr id="5" name="Disclaimer"/>
+          <p:cNvSpPr txBox="1"/>
+          <p:nvPr/>
+        </p:nvSpPr>
+        <p:spPr>
+          <a:xfrm>
+            <a:off x="731520" y="6309360"/>
+            <a:ext cx="8686800" cy="274320"/>
+          </a:xfrm>
+          <a:prstGeom prst="rect">
+            <a:avLst/>
+          </a:prstGeom>
+          <a:noFill/>
+          <a:ln/>
+        </p:spPr>
+        <p:txBody>
+          <a:bodyPr wrap="square" lIns="0" tIns="0" rIns="0" bIns="0" rtlCol="0" anchor="ctr"/>
+          <a:lstStyle/>
+          <a:p>
+            <a:pPr indent="0" marL="0">
+              <a:buNone/>
+            </a:pPr>
+            <a:r>
+              <a:rPr lang="en-US" sz="1050" dirty="0">
+                <a:solidFill>
+                  <a:srgbClr val="64748B"/>
+                </a:solidFill>
+              </a:rPr>
+              <a:t>Not an official U.S. government publication. Independent technical analysis; not reviewed or endorsed by any federal agency.</a:t>
+            </a:r>
+            <a:endParaRPr lang="en-US" sz="1050" dirty="0"/>
+          </a:p>
+        </p:txBody>
+      </p:sp>
+      <p:sp>
+        <p:nvSpPr>
+          <p:cNvPr id="6" name="Agenda line"/>
           <p:cNvSpPr txBox="1"/>
           <p:nvPr/>
         </p:nvSpPr>
@@ -2537,7 +2620,7 @@
       </p:sp>
       <p:sp>
         <p:nvSpPr>
-          <p:cNvPr id="5" name="Series line"/>
+          <p:cNvPr id="7" name="Series line"/>
           <p:cNvSpPr txBox="1"/>
           <p:nvPr/>
         </p:nvSpPr>
@@ -2565,7 +2648,7 @@
                   <a:srgbClr val="1F2A44"/>
                 </a:solidFill>
               </a:rPr>
-              <a:t>Modernization Workbook</a:t>
+              <a:t>Federal Modernization Workbook</a:t>
             </a:r>
             <a:endParaRPr lang="en-US" sz="1600" dirty="0"/>
           </a:p>
@@ -2653,7 +2736,13 @@
       </p:sp>
       <p:sp>
         <p:nvSpPr>
-          <p:cNvPr id="3" name="Tag How"/>
+          <p:cNvPr id="3" name="Tag How" descr="">
+            <a:extLst>
+              <a:ext uri="{C183D7F6-B498-43B3-948B-1728B52AA6E4}">
+                <adec:decorative xmlns:adec="http://schemas.microsoft.com/office/drawing/2017/decorative" val="1"/>
+              </a:ext>
+            </a:extLst>
+          </p:cNvPr>
           <p:cNvSpPr/>
           <p:nvPr/>
         </p:nvSpPr>
@@ -2864,7 +2953,13 @@
       </p:sp>
       <p:sp>
         <p:nvSpPr>
-          <p:cNvPr id="7" name="PKI box"/>
+          <p:cNvPr id="7" name="PKI box" descr="">
+            <a:extLst>
+              <a:ext uri="{C183D7F6-B498-43B3-948B-1728B52AA6E4}">
+                <adec:decorative xmlns:adec="http://schemas.microsoft.com/office/drawing/2017/decorative" val="1"/>
+              </a:ext>
+            </a:extLst>
+          </p:cNvPr>
           <p:cNvSpPr/>
           <p:nvPr/>
         </p:nvSpPr>
@@ -2898,7 +2993,13 @@
       </p:sp>
       <p:sp>
         <p:nvSpPr>
-          <p:cNvPr id="8" name="Icon FaKey"/>
+          <p:cNvPr id="8" name="Icon FaKey" descr="">
+            <a:extLst>
+              <a:ext uri="{C183D7F6-B498-43B3-948B-1728B52AA6E4}">
+                <adec:decorative xmlns:adec="http://schemas.microsoft.com/office/drawing/2017/decorative" val="1"/>
+              </a:ext>
+            </a:extLst>
+          </p:cNvPr>
           <p:cNvSpPr/>
           <p:nvPr/>
         </p:nvSpPr>
@@ -2923,7 +3024,13 @@
       </p:sp>
       <p:pic>
         <p:nvPicPr>
-          <p:cNvPr id="9" name="Image 0" descr="C:\Users\whale\git\mwb-b06\presentations\_build\icons\FaKey.png">    </p:cNvPr>
+          <p:cNvPr id="9" name="Image 0" descr="">
+            <a:extLst>
+              <a:ext uri="{C183D7F6-B498-43B3-948B-1728B52AA6E4}">
+                <adec:decorative xmlns:adec="http://schemas.microsoft.com/office/drawing/2017/decorative" val="1"/>
+              </a:ext>
+            </a:extLst>
+          </p:cNvPr>
           <p:cNvPicPr>
             <a:picLocks noChangeAspect="1"/>
           </p:cNvPicPr>
@@ -3062,7 +3169,13 @@
       </p:sp>
       <p:sp>
         <p:nvSpPr>
-          <p:cNvPr id="12" name="Logs"/>
+          <p:cNvPr id="12" name="Logs" descr="">
+            <a:extLst>
+              <a:ext uri="{C183D7F6-B498-43B3-948B-1728B52AA6E4}">
+                <adec:decorative xmlns:adec="http://schemas.microsoft.com/office/drawing/2017/decorative" val="1"/>
+              </a:ext>
+            </a:extLst>
+          </p:cNvPr>
           <p:cNvSpPr/>
           <p:nvPr/>
         </p:nvSpPr>
@@ -3096,7 +3209,13 @@
       </p:sp>
       <p:sp>
         <p:nvSpPr>
-          <p:cNvPr id="13" name="Icon FaTriangleExclamation"/>
+          <p:cNvPr id="13" name="Icon FaTriangleExclamation" descr="">
+            <a:extLst>
+              <a:ext uri="{C183D7F6-B498-43B3-948B-1728B52AA6E4}">
+                <adec:decorative xmlns:adec="http://schemas.microsoft.com/office/drawing/2017/decorative" val="1"/>
+              </a:ext>
+            </a:extLst>
+          </p:cNvPr>
           <p:cNvSpPr/>
           <p:nvPr/>
         </p:nvSpPr>
@@ -3121,7 +3240,13 @@
       </p:sp>
       <p:pic>
         <p:nvPicPr>
-          <p:cNvPr id="14" name="Image 1" descr="C:\Users\whale\git\mwb-b06\presentations\_build\icons\FaTriangleExclamation.png">    </p:cNvPr>
+          <p:cNvPr id="14" name="Image 1" descr="">
+            <a:extLst>
+              <a:ext uri="{C183D7F6-B498-43B3-948B-1728B52AA6E4}">
+                <adec:decorative xmlns:adec="http://schemas.microsoft.com/office/drawing/2017/decorative" val="1"/>
+              </a:ext>
+            </a:extLst>
+          </p:cNvPr>
           <p:cNvPicPr>
             <a:picLocks noChangeAspect="1"/>
           </p:cNvPicPr>
@@ -3339,7 +3464,13 @@
       </p:sp>
       <p:sp>
         <p:nvSpPr>
-          <p:cNvPr id="3" name="Tag How"/>
+          <p:cNvPr id="3" name="Tag How" descr="">
+            <a:extLst>
+              <a:ext uri="{C183D7F6-B498-43B3-948B-1728B52AA6E4}">
+                <adec:decorative xmlns:adec="http://schemas.microsoft.com/office/drawing/2017/decorative" val="1"/>
+              </a:ext>
+            </a:extLst>
+          </p:cNvPr>
           <p:cNvSpPr/>
           <p:nvPr/>
         </p:nvSpPr>
@@ -3402,7 +3533,13 @@
       </p:sp>
       <p:sp>
         <p:nvSpPr>
-          <p:cNvPr id="5" name="Ask 1"/>
+          <p:cNvPr id="5" name="Ask 1" descr="">
+            <a:extLst>
+              <a:ext uri="{C183D7F6-B498-43B3-948B-1728B52AA6E4}">
+                <adec:decorative xmlns:adec="http://schemas.microsoft.com/office/drawing/2017/decorative" val="1"/>
+              </a:ext>
+            </a:extLst>
+          </p:cNvPr>
           <p:cNvSpPr/>
           <p:nvPr/>
         </p:nvSpPr>
@@ -3436,7 +3573,13 @@
       </p:sp>
       <p:sp>
         <p:nvSpPr>
-          <p:cNvPr id="6" name="Icon FaFilter"/>
+          <p:cNvPr id="6" name="Icon FaFilter" descr="">
+            <a:extLst>
+              <a:ext uri="{C183D7F6-B498-43B3-948B-1728B52AA6E4}">
+                <adec:decorative xmlns:adec="http://schemas.microsoft.com/office/drawing/2017/decorative" val="1"/>
+              </a:ext>
+            </a:extLst>
+          </p:cNvPr>
           <p:cNvSpPr/>
           <p:nvPr/>
         </p:nvSpPr>
@@ -3461,7 +3604,13 @@
       </p:sp>
       <p:pic>
         <p:nvPicPr>
-          <p:cNvPr id="7" name="Image 0" descr="C:\Users\whale\git\mwb-b06\presentations\_build\icons\FaFilter.png">    </p:cNvPr>
+          <p:cNvPr id="7" name="Image 0" descr="">
+            <a:extLst>
+              <a:ext uri="{C183D7F6-B498-43B3-948B-1728B52AA6E4}">
+                <adec:decorative xmlns:adec="http://schemas.microsoft.com/office/drawing/2017/decorative" val="1"/>
+              </a:ext>
+            </a:extLst>
+          </p:cNvPr>
           <p:cNvPicPr>
             <a:picLocks noChangeAspect="1"/>
           </p:cNvPicPr>
@@ -3538,7 +3687,13 @@
       </p:sp>
       <p:sp>
         <p:nvSpPr>
-          <p:cNvPr id="9" name="Ask 2"/>
+          <p:cNvPr id="9" name="Ask 2" descr="">
+            <a:extLst>
+              <a:ext uri="{C183D7F6-B498-43B3-948B-1728B52AA6E4}">
+                <adec:decorative xmlns:adec="http://schemas.microsoft.com/office/drawing/2017/decorative" val="1"/>
+              </a:ext>
+            </a:extLst>
+          </p:cNvPr>
           <p:cNvSpPr/>
           <p:nvPr/>
         </p:nvSpPr>
@@ -3572,7 +3727,13 @@
       </p:sp>
       <p:sp>
         <p:nvSpPr>
-          <p:cNvPr id="10" name="Icon FaServer"/>
+          <p:cNvPr id="10" name="Icon FaServer" descr="">
+            <a:extLst>
+              <a:ext uri="{C183D7F6-B498-43B3-948B-1728B52AA6E4}">
+                <adec:decorative xmlns:adec="http://schemas.microsoft.com/office/drawing/2017/decorative" val="1"/>
+              </a:ext>
+            </a:extLst>
+          </p:cNvPr>
           <p:cNvSpPr/>
           <p:nvPr/>
         </p:nvSpPr>
@@ -3597,7 +3758,13 @@
       </p:sp>
       <p:pic>
         <p:nvPicPr>
-          <p:cNvPr id="11" name="Image 1" descr="C:\Users\whale\git\mwb-b06\presentations\_build\icons\FaServer.png">    </p:cNvPr>
+          <p:cNvPr id="11" name="Image 1" descr="">
+            <a:extLst>
+              <a:ext uri="{C183D7F6-B498-43B3-948B-1728B52AA6E4}">
+                <adec:decorative xmlns:adec="http://schemas.microsoft.com/office/drawing/2017/decorative" val="1"/>
+              </a:ext>
+            </a:extLst>
+          </p:cNvPr>
           <p:cNvPicPr>
             <a:picLocks noChangeAspect="1"/>
           </p:cNvPicPr>
@@ -3674,7 +3841,13 @@
       </p:sp>
       <p:sp>
         <p:nvSpPr>
-          <p:cNvPr id="13" name="Ask 3"/>
+          <p:cNvPr id="13" name="Ask 3" descr="">
+            <a:extLst>
+              <a:ext uri="{C183D7F6-B498-43B3-948B-1728B52AA6E4}">
+                <adec:decorative xmlns:adec="http://schemas.microsoft.com/office/drawing/2017/decorative" val="1"/>
+              </a:ext>
+            </a:extLst>
+          </p:cNvPr>
           <p:cNvSpPr/>
           <p:nvPr/>
         </p:nvSpPr>
@@ -3708,7 +3881,13 @@
       </p:sp>
       <p:sp>
         <p:nvSpPr>
-          <p:cNvPr id="14" name="Icon FaUserClock"/>
+          <p:cNvPr id="14" name="Icon FaUserClock" descr="">
+            <a:extLst>
+              <a:ext uri="{C183D7F6-B498-43B3-948B-1728B52AA6E4}">
+                <adec:decorative xmlns:adec="http://schemas.microsoft.com/office/drawing/2017/decorative" val="1"/>
+              </a:ext>
+            </a:extLst>
+          </p:cNvPr>
           <p:cNvSpPr/>
           <p:nvPr/>
         </p:nvSpPr>
@@ -3733,7 +3912,13 @@
       </p:sp>
       <p:pic>
         <p:nvPicPr>
-          <p:cNvPr id="15" name="Image 2" descr="C:\Users\whale\git\mwb-b06\presentations\_build\icons\FaUserClock.png">    </p:cNvPr>
+          <p:cNvPr id="15" name="Image 2" descr="">
+            <a:extLst>
+              <a:ext uri="{C183D7F6-B498-43B3-948B-1728B52AA6E4}">
+                <adec:decorative xmlns:adec="http://schemas.microsoft.com/office/drawing/2017/decorative" val="1"/>
+              </a:ext>
+            </a:extLst>
+          </p:cNvPr>
           <p:cNvPicPr>
             <a:picLocks noChangeAspect="1"/>
           </p:cNvPicPr>
@@ -3810,7 +3995,13 @@
       </p:sp>
       <p:sp>
         <p:nvSpPr>
-          <p:cNvPr id="17" name="Ask 4"/>
+          <p:cNvPr id="17" name="Ask 4" descr="">
+            <a:extLst>
+              <a:ext uri="{C183D7F6-B498-43B3-948B-1728B52AA6E4}">
+                <adec:decorative xmlns:adec="http://schemas.microsoft.com/office/drawing/2017/decorative" val="1"/>
+              </a:ext>
+            </a:extLst>
+          </p:cNvPr>
           <p:cNvSpPr/>
           <p:nvPr/>
         </p:nvSpPr>
@@ -3844,7 +4035,13 @@
       </p:sp>
       <p:sp>
         <p:nvSpPr>
-          <p:cNvPr id="18" name="Icon FaKey"/>
+          <p:cNvPr id="18" name="Icon FaKey" descr="">
+            <a:extLst>
+              <a:ext uri="{C183D7F6-B498-43B3-948B-1728B52AA6E4}">
+                <adec:decorative xmlns:adec="http://schemas.microsoft.com/office/drawing/2017/decorative" val="1"/>
+              </a:ext>
+            </a:extLst>
+          </p:cNvPr>
           <p:cNvSpPr/>
           <p:nvPr/>
         </p:nvSpPr>
@@ -3869,7 +4066,13 @@
       </p:sp>
       <p:pic>
         <p:nvPicPr>
-          <p:cNvPr id="19" name="Image 3" descr="C:\Users\whale\git\mwb-b06\presentations\_build\icons\FaKey.png">    </p:cNvPr>
+          <p:cNvPr id="19" name="Image 3" descr="">
+            <a:extLst>
+              <a:ext uri="{C183D7F6-B498-43B3-948B-1728B52AA6E4}">
+                <adec:decorative xmlns:adec="http://schemas.microsoft.com/office/drawing/2017/decorative" val="1"/>
+              </a:ext>
+            </a:extLst>
+          </p:cNvPr>
           <p:cNvPicPr>
             <a:picLocks noChangeAspect="1"/>
           </p:cNvPicPr>
@@ -3946,7 +4149,13 @@
       </p:sp>
       <p:sp>
         <p:nvSpPr>
-          <p:cNvPr id="21" name="Next"/>
+          <p:cNvPr id="21" name="Next" descr="">
+            <a:extLst>
+              <a:ext uri="{C183D7F6-B498-43B3-948B-1728B52AA6E4}">
+                <adec:decorative xmlns:adec="http://schemas.microsoft.com/office/drawing/2017/decorative" val="1"/>
+              </a:ext>
+            </a:extLst>
+          </p:cNvPr>
           <p:cNvSpPr/>
           <p:nvPr/>
         </p:nvSpPr>
@@ -3980,7 +4189,13 @@
       </p:sp>
       <p:sp>
         <p:nvSpPr>
-          <p:cNvPr id="22" name="Icon FaBook"/>
+          <p:cNvPr id="22" name="Icon FaBook" descr="">
+            <a:extLst>
+              <a:ext uri="{C183D7F6-B498-43B3-948B-1728B52AA6E4}">
+                <adec:decorative xmlns:adec="http://schemas.microsoft.com/office/drawing/2017/decorative" val="1"/>
+              </a:ext>
+            </a:extLst>
+          </p:cNvPr>
           <p:cNvSpPr/>
           <p:nvPr/>
         </p:nvSpPr>
@@ -4005,7 +4220,13 @@
       </p:sp>
       <p:pic>
         <p:nvPicPr>
-          <p:cNvPr id="23" name="Image 4" descr="C:\Users\whale\git\mwb-b06\presentations\_build\icons\FaBook.png">    </p:cNvPr>
+          <p:cNvPr id="23" name="Image 4" descr="">
+            <a:extLst>
+              <a:ext uri="{C183D7F6-B498-43B3-948B-1728B52AA6E4}">
+                <adec:decorative xmlns:adec="http://schemas.microsoft.com/office/drawing/2017/decorative" val="1"/>
+              </a:ext>
+            </a:extLst>
+          </p:cNvPr>
           <p:cNvPicPr>
             <a:picLocks noChangeAspect="1"/>
           </p:cNvPicPr>
@@ -4593,7 +4814,13 @@
       </p:sp>
       <p:sp>
         <p:nvSpPr>
-          <p:cNvPr id="3" name="Tag Why"/>
+          <p:cNvPr id="3" name="Tag Why" descr="">
+            <a:extLst>
+              <a:ext uri="{C183D7F6-B498-43B3-948B-1728B52AA6E4}">
+                <adec:decorative xmlns:adec="http://schemas.microsoft.com/office/drawing/2017/decorative" val="1"/>
+              </a:ext>
+            </a:extLst>
+          </p:cNvPr>
           <p:cNvSpPr/>
           <p:nvPr/>
         </p:nvSpPr>
@@ -4692,7 +4919,13 @@
       </p:sp>
       <p:sp>
         <p:nvSpPr>
-          <p:cNvPr id="6" name="Way 0"/>
+          <p:cNvPr id="6" name="Way 0" descr="">
+            <a:extLst>
+              <a:ext uri="{C183D7F6-B498-43B3-948B-1728B52AA6E4}">
+                <adec:decorative xmlns:adec="http://schemas.microsoft.com/office/drawing/2017/decorative" val="1"/>
+              </a:ext>
+            </a:extLst>
+          </p:cNvPr>
           <p:cNvSpPr/>
           <p:nvPr/>
         </p:nvSpPr>
@@ -4779,7 +5012,13 @@
       </p:sp>
       <p:sp>
         <p:nvSpPr>
-          <p:cNvPr id="8" name="Way 1"/>
+          <p:cNvPr id="8" name="Way 1" descr="">
+            <a:extLst>
+              <a:ext uri="{C183D7F6-B498-43B3-948B-1728B52AA6E4}">
+                <adec:decorative xmlns:adec="http://schemas.microsoft.com/office/drawing/2017/decorative" val="1"/>
+              </a:ext>
+            </a:extLst>
+          </p:cNvPr>
           <p:cNvSpPr/>
           <p:nvPr/>
         </p:nvSpPr>
@@ -4866,7 +5105,13 @@
       </p:sp>
       <p:sp>
         <p:nvSpPr>
-          <p:cNvPr id="10" name="Way 2"/>
+          <p:cNvPr id="10" name="Way 2" descr="">
+            <a:extLst>
+              <a:ext uri="{C183D7F6-B498-43B3-948B-1728B52AA6E4}">
+                <adec:decorative xmlns:adec="http://schemas.microsoft.com/office/drawing/2017/decorative" val="1"/>
+              </a:ext>
+            </a:extLst>
+          </p:cNvPr>
           <p:cNvSpPr/>
           <p:nvPr/>
         </p:nvSpPr>
@@ -4953,7 +5198,13 @@
       </p:sp>
       <p:sp>
         <p:nvSpPr>
-          <p:cNvPr id="12" name="Way 3"/>
+          <p:cNvPr id="12" name="Way 3" descr="">
+            <a:extLst>
+              <a:ext uri="{C183D7F6-B498-43B3-948B-1728B52AA6E4}">
+                <adec:decorative xmlns:adec="http://schemas.microsoft.com/office/drawing/2017/decorative" val="1"/>
+              </a:ext>
+            </a:extLst>
+          </p:cNvPr>
           <p:cNvSpPr/>
           <p:nvPr/>
         </p:nvSpPr>
@@ -5116,7 +5367,13 @@
       </p:sp>
       <p:sp>
         <p:nvSpPr>
-          <p:cNvPr id="15" name="Good engineering"/>
+          <p:cNvPr id="15" name="Good engineering" descr="">
+            <a:extLst>
+              <a:ext uri="{C183D7F6-B498-43B3-948B-1728B52AA6E4}">
+                <adec:decorative xmlns:adec="http://schemas.microsoft.com/office/drawing/2017/decorative" val="1"/>
+              </a:ext>
+            </a:extLst>
+          </p:cNvPr>
           <p:cNvSpPr/>
           <p:nvPr/>
         </p:nvSpPr>
@@ -5150,7 +5407,13 @@
       </p:sp>
       <p:sp>
         <p:nvSpPr>
-          <p:cNvPr id="16" name="Icon FaLightbulb"/>
+          <p:cNvPr id="16" name="Icon FaLightbulb" descr="">
+            <a:extLst>
+              <a:ext uri="{C183D7F6-B498-43B3-948B-1728B52AA6E4}">
+                <adec:decorative xmlns:adec="http://schemas.microsoft.com/office/drawing/2017/decorative" val="1"/>
+              </a:ext>
+            </a:extLst>
+          </p:cNvPr>
           <p:cNvSpPr/>
           <p:nvPr/>
         </p:nvSpPr>
@@ -5175,7 +5438,13 @@
       </p:sp>
       <p:pic>
         <p:nvPicPr>
-          <p:cNvPr id="17" name="Image 0" descr="C:\Users\whale\git\mwb-b06\presentations\_build\icons\FaLightbulb.png">    </p:cNvPr>
+          <p:cNvPr id="17" name="Image 0" descr="">
+            <a:extLst>
+              <a:ext uri="{C183D7F6-B498-43B3-948B-1728B52AA6E4}">
+                <adec:decorative xmlns:adec="http://schemas.microsoft.com/office/drawing/2017/decorative" val="1"/>
+              </a:ext>
+            </a:extLst>
+          </p:cNvPr>
           <p:cNvPicPr>
             <a:picLocks noChangeAspect="1"/>
           </p:cNvPicPr>
@@ -5393,7 +5662,13 @@
       </p:sp>
       <p:sp>
         <p:nvSpPr>
-          <p:cNvPr id="3" name="Tag Why"/>
+          <p:cNvPr id="3" name="Tag Why" descr="">
+            <a:extLst>
+              <a:ext uri="{C183D7F6-B498-43B3-948B-1728B52AA6E4}">
+                <adec:decorative xmlns:adec="http://schemas.microsoft.com/office/drawing/2017/decorative" val="1"/>
+              </a:ext>
+            </a:extLst>
+          </p:cNvPr>
           <p:cNvSpPr/>
           <p:nvPr/>
         </p:nvSpPr>
@@ -5456,7 +5731,13 @@
       </p:sp>
       <p:sp>
         <p:nvSpPr>
-          <p:cNvPr id="5" name="Icon FaPlugCircleXmark"/>
+          <p:cNvPr id="5" name="Icon FaPlugCircleXmark" descr="">
+            <a:extLst>
+              <a:ext uri="{C183D7F6-B498-43B3-948B-1728B52AA6E4}">
+                <adec:decorative xmlns:adec="http://schemas.microsoft.com/office/drawing/2017/decorative" val="1"/>
+              </a:ext>
+            </a:extLst>
+          </p:cNvPr>
           <p:cNvSpPr/>
           <p:nvPr/>
         </p:nvSpPr>
@@ -5481,7 +5762,13 @@
       </p:sp>
       <p:pic>
         <p:nvPicPr>
-          <p:cNvPr id="6" name="Image 0" descr="C:\Users\whale\git\mwb-b06\presentations\_build\icons\FaPlugCircleXmark.png">    </p:cNvPr>
+          <p:cNvPr id="6" name="Image 0" descr="">
+            <a:extLst>
+              <a:ext uri="{C183D7F6-B498-43B3-948B-1728B52AA6E4}">
+                <adec:decorative xmlns:adec="http://schemas.microsoft.com/office/drawing/2017/decorative" val="1"/>
+              </a:ext>
+            </a:extLst>
+          </p:cNvPr>
           <p:cNvPicPr>
             <a:picLocks noChangeAspect="1"/>
           </p:cNvPicPr>
@@ -5555,7 +5842,13 @@
       </p:sp>
       <p:sp>
         <p:nvSpPr>
-          <p:cNvPr id="8" name="Icon FaShieldHalved"/>
+          <p:cNvPr id="8" name="Icon FaShieldHalved" descr="">
+            <a:extLst>
+              <a:ext uri="{C183D7F6-B498-43B3-948B-1728B52AA6E4}">
+                <adec:decorative xmlns:adec="http://schemas.microsoft.com/office/drawing/2017/decorative" val="1"/>
+              </a:ext>
+            </a:extLst>
+          </p:cNvPr>
           <p:cNvSpPr/>
           <p:nvPr/>
         </p:nvSpPr>
@@ -5580,7 +5873,13 @@
       </p:sp>
       <p:pic>
         <p:nvPicPr>
-          <p:cNvPr id="9" name="Image 1" descr="C:\Users\whale\git\mwb-b06\presentations\_build\icons\FaShieldHalved.png">    </p:cNvPr>
+          <p:cNvPr id="9" name="Image 1" descr="">
+            <a:extLst>
+              <a:ext uri="{C183D7F6-B498-43B3-948B-1728B52AA6E4}">
+                <adec:decorative xmlns:adec="http://schemas.microsoft.com/office/drawing/2017/decorative" val="1"/>
+              </a:ext>
+            </a:extLst>
+          </p:cNvPr>
           <p:cNvPicPr>
             <a:picLocks noChangeAspect="1"/>
           </p:cNvPicPr>
@@ -5654,7 +5953,13 @@
       </p:sp>
       <p:sp>
         <p:nvSpPr>
-          <p:cNvPr id="11" name="Icon FaKey"/>
+          <p:cNvPr id="11" name="Icon FaKey" descr="">
+            <a:extLst>
+              <a:ext uri="{C183D7F6-B498-43B3-948B-1728B52AA6E4}">
+                <adec:decorative xmlns:adec="http://schemas.microsoft.com/office/drawing/2017/decorative" val="1"/>
+              </a:ext>
+            </a:extLst>
+          </p:cNvPr>
           <p:cNvSpPr/>
           <p:nvPr/>
         </p:nvSpPr>
@@ -5679,7 +5984,13 @@
       </p:sp>
       <p:pic>
         <p:nvPicPr>
-          <p:cNvPr id="12" name="Image 2" descr="C:\Users\whale\git\mwb-b06\presentations\_build\icons\FaKey.png">    </p:cNvPr>
+          <p:cNvPr id="12" name="Image 2" descr="">
+            <a:extLst>
+              <a:ext uri="{C183D7F6-B498-43B3-948B-1728B52AA6E4}">
+                <adec:decorative xmlns:adec="http://schemas.microsoft.com/office/drawing/2017/decorative" val="1"/>
+              </a:ext>
+            </a:extLst>
+          </p:cNvPr>
           <p:cNvPicPr>
             <a:picLocks noChangeAspect="1"/>
           </p:cNvPicPr>
@@ -5772,7 +6083,7 @@
         <a:graphic>
           <a:graphicData uri="http://schemas.openxmlformats.org/drawingml/2006/table">
             <a:tbl>
-              <a:tblPr/>
+              <a:tblPr firstRow="1" bandRow="1"/>
               <a:tblGrid>
                 <a:gridCol w="2011680"/>
                 <a:gridCol w="3063240"/>
@@ -6473,7 +6784,13 @@
       </p:graphicFrame>
       <p:sp>
         <p:nvSpPr>
-          <p:cNvPr id="15" name="No deadline"/>
+          <p:cNvPr id="15" name="No deadline" descr="">
+            <a:extLst>
+              <a:ext uri="{C183D7F6-B498-43B3-948B-1728B52AA6E4}">
+                <adec:decorative xmlns:adec="http://schemas.microsoft.com/office/drawing/2017/decorative" val="1"/>
+              </a:ext>
+            </a:extLst>
+          </p:cNvPr>
           <p:cNvSpPr/>
           <p:nvPr/>
         </p:nvSpPr>
@@ -6507,7 +6824,13 @@
       </p:sp>
       <p:sp>
         <p:nvSpPr>
-          <p:cNvPr id="16" name="Icon FaScaleBalanced"/>
+          <p:cNvPr id="16" name="Icon FaScaleBalanced" descr="">
+            <a:extLst>
+              <a:ext uri="{C183D7F6-B498-43B3-948B-1728B52AA6E4}">
+                <adec:decorative xmlns:adec="http://schemas.microsoft.com/office/drawing/2017/decorative" val="1"/>
+              </a:ext>
+            </a:extLst>
+          </p:cNvPr>
           <p:cNvSpPr/>
           <p:nvPr/>
         </p:nvSpPr>
@@ -6532,7 +6855,13 @@
       </p:sp>
       <p:pic>
         <p:nvPicPr>
-          <p:cNvPr id="17" name="Image 3" descr="C:\Users\whale\git\mwb-b06\presentations\_build\icons\FaScaleBalanced.png">    </p:cNvPr>
+          <p:cNvPr id="17" name="Image 3" descr="">
+            <a:extLst>
+              <a:ext uri="{C183D7F6-B498-43B3-948B-1728B52AA6E4}">
+                <adec:decorative xmlns:adec="http://schemas.microsoft.com/office/drawing/2017/decorative" val="1"/>
+              </a:ext>
+            </a:extLst>
+          </p:cNvPr>
           <p:cNvPicPr>
             <a:picLocks noChangeAspect="1"/>
           </p:cNvPicPr>
@@ -6750,7 +7079,13 @@
       </p:sp>
       <p:sp>
         <p:nvSpPr>
-          <p:cNvPr id="3" name="Tag What"/>
+          <p:cNvPr id="3" name="Tag What" descr="">
+            <a:extLst>
+              <a:ext uri="{C183D7F6-B498-43B3-948B-1728B52AA6E4}">
+                <adec:decorative xmlns:adec="http://schemas.microsoft.com/office/drawing/2017/decorative" val="1"/>
+              </a:ext>
+            </a:extLst>
+          </p:cNvPr>
           <p:cNvSpPr/>
           <p:nvPr/>
         </p:nvSpPr>
@@ -6813,7 +7148,13 @@
       </p:sp>
       <p:sp>
         <p:nvSpPr>
-          <p:cNvPr id="5" name="V 0"/>
+          <p:cNvPr id="5" name="V 0" descr="">
+            <a:extLst>
+              <a:ext uri="{C183D7F6-B498-43B3-948B-1728B52AA6E4}">
+                <adec:decorative xmlns:adec="http://schemas.microsoft.com/office/drawing/2017/decorative" val="1"/>
+              </a:ext>
+            </a:extLst>
+          </p:cNvPr>
           <p:cNvSpPr/>
           <p:nvPr/>
         </p:nvSpPr>
@@ -6900,7 +7241,13 @@
       </p:sp>
       <p:sp>
         <p:nvSpPr>
-          <p:cNvPr id="7" name="V 1"/>
+          <p:cNvPr id="7" name="V 1" descr="">
+            <a:extLst>
+              <a:ext uri="{C183D7F6-B498-43B3-948B-1728B52AA6E4}">
+                <adec:decorative xmlns:adec="http://schemas.microsoft.com/office/drawing/2017/decorative" val="1"/>
+              </a:ext>
+            </a:extLst>
+          </p:cNvPr>
           <p:cNvSpPr/>
           <p:nvPr/>
         </p:nvSpPr>
@@ -6987,7 +7334,13 @@
       </p:sp>
       <p:sp>
         <p:nvSpPr>
-          <p:cNvPr id="9" name="V 2"/>
+          <p:cNvPr id="9" name="V 2" descr="">
+            <a:extLst>
+              <a:ext uri="{C183D7F6-B498-43B3-948B-1728B52AA6E4}">
+                <adec:decorative xmlns:adec="http://schemas.microsoft.com/office/drawing/2017/decorative" val="1"/>
+              </a:ext>
+            </a:extLst>
+          </p:cNvPr>
           <p:cNvSpPr/>
           <p:nvPr/>
         </p:nvSpPr>
@@ -7150,7 +7503,13 @@
       </p:sp>
       <p:sp>
         <p:nvSpPr>
-          <p:cNvPr id="12" name="Gate"/>
+          <p:cNvPr id="12" name="Gate" descr="">
+            <a:extLst>
+              <a:ext uri="{C183D7F6-B498-43B3-948B-1728B52AA6E4}">
+                <adec:decorative xmlns:adec="http://schemas.microsoft.com/office/drawing/2017/decorative" val="1"/>
+              </a:ext>
+            </a:extLst>
+          </p:cNvPr>
           <p:cNvSpPr/>
           <p:nvPr/>
         </p:nvSpPr>
@@ -7184,7 +7543,13 @@
       </p:sp>
       <p:sp>
         <p:nvSpPr>
-          <p:cNvPr id="13" name="Icon FaFilter"/>
+          <p:cNvPr id="13" name="Icon FaFilter" descr="">
+            <a:extLst>
+              <a:ext uri="{C183D7F6-B498-43B3-948B-1728B52AA6E4}">
+                <adec:decorative xmlns:adec="http://schemas.microsoft.com/office/drawing/2017/decorative" val="1"/>
+              </a:ext>
+            </a:extLst>
+          </p:cNvPr>
           <p:cNvSpPr/>
           <p:nvPr/>
         </p:nvSpPr>
@@ -7209,7 +7574,13 @@
       </p:sp>
       <p:pic>
         <p:nvPicPr>
-          <p:cNvPr id="14" name="Image 0" descr="C:\Users\whale\git\mwb-b06\presentations\_build\icons\FaFilter.png">    </p:cNvPr>
+          <p:cNvPr id="14" name="Image 0" descr="">
+            <a:extLst>
+              <a:ext uri="{C183D7F6-B498-43B3-948B-1728B52AA6E4}">
+                <adec:decorative xmlns:adec="http://schemas.microsoft.com/office/drawing/2017/decorative" val="1"/>
+              </a:ext>
+            </a:extLst>
+          </p:cNvPr>
           <p:cNvPicPr>
             <a:picLocks noChangeAspect="1"/>
           </p:cNvPicPr>
@@ -7427,7 +7798,13 @@
       </p:sp>
       <p:sp>
         <p:nvSpPr>
-          <p:cNvPr id="3" name="Tag What"/>
+          <p:cNvPr id="3" name="Tag What" descr="">
+            <a:extLst>
+              <a:ext uri="{C183D7F6-B498-43B3-948B-1728B52AA6E4}">
+                <adec:decorative xmlns:adec="http://schemas.microsoft.com/office/drawing/2017/decorative" val="1"/>
+              </a:ext>
+            </a:extLst>
+          </p:cNvPr>
           <p:cNvSpPr/>
           <p:nvPr/>
         </p:nvSpPr>
@@ -7490,7 +7867,13 @@
       </p:sp>
       <p:sp>
         <p:nvSpPr>
-          <p:cNvPr id="5" name="Col 0"/>
+          <p:cNvPr id="5" name="Col 0" descr="">
+            <a:extLst>
+              <a:ext uri="{C183D7F6-B498-43B3-948B-1728B52AA6E4}">
+                <adec:decorative xmlns:adec="http://schemas.microsoft.com/office/drawing/2017/decorative" val="1"/>
+              </a:ext>
+            </a:extLst>
+          </p:cNvPr>
           <p:cNvSpPr/>
           <p:nvPr/>
         </p:nvSpPr>
@@ -7524,7 +7907,13 @@
       </p:sp>
       <p:sp>
         <p:nvSpPr>
-          <p:cNvPr id="6" name="Icon FaServer"/>
+          <p:cNvPr id="6" name="Icon FaServer" descr="">
+            <a:extLst>
+              <a:ext uri="{C183D7F6-B498-43B3-948B-1728B52AA6E4}">
+                <adec:decorative xmlns:adec="http://schemas.microsoft.com/office/drawing/2017/decorative" val="1"/>
+              </a:ext>
+            </a:extLst>
+          </p:cNvPr>
           <p:cNvSpPr/>
           <p:nvPr/>
         </p:nvSpPr>
@@ -7549,7 +7938,13 @@
       </p:sp>
       <p:pic>
         <p:nvPicPr>
-          <p:cNvPr id="7" name="Image 0" descr="C:\Users\whale\git\mwb-b06\presentations\_build\icons\FaServer.png">    </p:cNvPr>
+          <p:cNvPr id="7" name="Image 0" descr="">
+            <a:extLst>
+              <a:ext uri="{C183D7F6-B498-43B3-948B-1728B52AA6E4}">
+                <adec:decorative xmlns:adec="http://schemas.microsoft.com/office/drawing/2017/decorative" val="1"/>
+              </a:ext>
+            </a:extLst>
+          </p:cNvPr>
           <p:cNvPicPr>
             <a:picLocks noChangeAspect="1"/>
           </p:cNvPicPr>
@@ -7706,7 +8101,13 @@
       </p:sp>
       <p:sp>
         <p:nvSpPr>
-          <p:cNvPr id="10" name="Col 1"/>
+          <p:cNvPr id="10" name="Col 1" descr="">
+            <a:extLst>
+              <a:ext uri="{C183D7F6-B498-43B3-948B-1728B52AA6E4}">
+                <adec:decorative xmlns:adec="http://schemas.microsoft.com/office/drawing/2017/decorative" val="1"/>
+              </a:ext>
+            </a:extLst>
+          </p:cNvPr>
           <p:cNvSpPr/>
           <p:nvPr/>
         </p:nvSpPr>
@@ -7740,7 +8141,13 @@
       </p:sp>
       <p:sp>
         <p:nvSpPr>
-          <p:cNvPr id="11" name="Icon FaTriangleExclamation"/>
+          <p:cNvPr id="11" name="Icon FaTriangleExclamation" descr="">
+            <a:extLst>
+              <a:ext uri="{C183D7F6-B498-43B3-948B-1728B52AA6E4}">
+                <adec:decorative xmlns:adec="http://schemas.microsoft.com/office/drawing/2017/decorative" val="1"/>
+              </a:ext>
+            </a:extLst>
+          </p:cNvPr>
           <p:cNvSpPr/>
           <p:nvPr/>
         </p:nvSpPr>
@@ -7765,7 +8172,13 @@
       </p:sp>
       <p:pic>
         <p:nvPicPr>
-          <p:cNvPr id="12" name="Image 1" descr="C:\Users\whale\git\mwb-b06\presentations\_build\icons\FaTriangleExclamation.png">    </p:cNvPr>
+          <p:cNvPr id="12" name="Image 1" descr="">
+            <a:extLst>
+              <a:ext uri="{C183D7F6-B498-43B3-948B-1728B52AA6E4}">
+                <adec:decorative xmlns:adec="http://schemas.microsoft.com/office/drawing/2017/decorative" val="1"/>
+              </a:ext>
+            </a:extLst>
+          </p:cNvPr>
           <p:cNvPicPr>
             <a:picLocks noChangeAspect="1"/>
           </p:cNvPicPr>
@@ -7922,7 +8335,13 @@
       </p:sp>
       <p:sp>
         <p:nvSpPr>
-          <p:cNvPr id="15" name="Choice"/>
+          <p:cNvPr id="15" name="Choice" descr="">
+            <a:extLst>
+              <a:ext uri="{C183D7F6-B498-43B3-948B-1728B52AA6E4}">
+                <adec:decorative xmlns:adec="http://schemas.microsoft.com/office/drawing/2017/decorative" val="1"/>
+              </a:ext>
+            </a:extLst>
+          </p:cNvPr>
           <p:cNvSpPr/>
           <p:nvPr/>
         </p:nvSpPr>
@@ -7956,7 +8375,13 @@
       </p:sp>
       <p:sp>
         <p:nvSpPr>
-          <p:cNvPr id="16" name="Icon FaRoute"/>
+          <p:cNvPr id="16" name="Icon FaRoute" descr="">
+            <a:extLst>
+              <a:ext uri="{C183D7F6-B498-43B3-948B-1728B52AA6E4}">
+                <adec:decorative xmlns:adec="http://schemas.microsoft.com/office/drawing/2017/decorative" val="1"/>
+              </a:ext>
+            </a:extLst>
+          </p:cNvPr>
           <p:cNvSpPr/>
           <p:nvPr/>
         </p:nvSpPr>
@@ -7981,7 +8406,13 @@
       </p:sp>
       <p:pic>
         <p:nvPicPr>
-          <p:cNvPr id="17" name="Image 2" descr="C:\Users\whale\git\mwb-b06\presentations\_build\icons\FaRoute.png">    </p:cNvPr>
+          <p:cNvPr id="17" name="Image 2" descr="">
+            <a:extLst>
+              <a:ext uri="{C183D7F6-B498-43B3-948B-1728B52AA6E4}">
+                <adec:decorative xmlns:adec="http://schemas.microsoft.com/office/drawing/2017/decorative" val="1"/>
+              </a:ext>
+            </a:extLst>
+          </p:cNvPr>
           <p:cNvPicPr>
             <a:picLocks noChangeAspect="1"/>
           </p:cNvPicPr>
@@ -8199,7 +8630,13 @@
       </p:sp>
       <p:sp>
         <p:nvSpPr>
-          <p:cNvPr id="3" name="Tag What"/>
+          <p:cNvPr id="3" name="Tag What" descr="">
+            <a:extLst>
+              <a:ext uri="{C183D7F6-B498-43B3-948B-1728B52AA6E4}">
+                <adec:decorative xmlns:adec="http://schemas.microsoft.com/office/drawing/2017/decorative" val="1"/>
+              </a:ext>
+            </a:extLst>
+          </p:cNvPr>
           <p:cNvSpPr/>
           <p:nvPr/>
         </p:nvSpPr>
@@ -8281,7 +8718,7 @@
         <a:graphic>
           <a:graphicData uri="http://schemas.openxmlformats.org/drawingml/2006/table">
             <a:tbl>
-              <a:tblPr/>
+              <a:tblPr firstRow="1" bandRow="1"/>
               <a:tblGrid>
                 <a:gridCol w="2103120"/>
                 <a:gridCol w="4206240"/>
@@ -9164,7 +9601,13 @@
       </p:sp>
       <p:sp>
         <p:nvSpPr>
-          <p:cNvPr id="7" name="Admin"/>
+          <p:cNvPr id="7" name="Admin" descr="">
+            <a:extLst>
+              <a:ext uri="{C183D7F6-B498-43B3-948B-1728B52AA6E4}">
+                <adec:decorative xmlns:adec="http://schemas.microsoft.com/office/drawing/2017/decorative" val="1"/>
+              </a:ext>
+            </a:extLst>
+          </p:cNvPr>
           <p:cNvSpPr/>
           <p:nvPr/>
         </p:nvSpPr>
@@ -9198,7 +9641,13 @@
       </p:sp>
       <p:sp>
         <p:nvSpPr>
-          <p:cNvPr id="8" name="Icon FaUserShield"/>
+          <p:cNvPr id="8" name="Icon FaUserShield" descr="">
+            <a:extLst>
+              <a:ext uri="{C183D7F6-B498-43B3-948B-1728B52AA6E4}">
+                <adec:decorative xmlns:adec="http://schemas.microsoft.com/office/drawing/2017/decorative" val="1"/>
+              </a:ext>
+            </a:extLst>
+          </p:cNvPr>
           <p:cNvSpPr/>
           <p:nvPr/>
         </p:nvSpPr>
@@ -9223,7 +9672,13 @@
       </p:sp>
       <p:pic>
         <p:nvPicPr>
-          <p:cNvPr id="9" name="Image 0" descr="C:\Users\whale\git\mwb-b06\presentations\_build\icons\FaUserShield.png">    </p:cNvPr>
+          <p:cNvPr id="9" name="Image 0" descr="">
+            <a:extLst>
+              <a:ext uri="{C183D7F6-B498-43B3-948B-1728B52AA6E4}">
+                <adec:decorative xmlns:adec="http://schemas.microsoft.com/office/drawing/2017/decorative" val="1"/>
+              </a:ext>
+            </a:extLst>
+          </p:cNvPr>
           <p:cNvPicPr>
             <a:picLocks noChangeAspect="1"/>
           </p:cNvPicPr>
@@ -9441,7 +9896,13 @@
       </p:sp>
       <p:sp>
         <p:nvSpPr>
-          <p:cNvPr id="3" name="Tag Who"/>
+          <p:cNvPr id="3" name="Tag Who" descr="">
+            <a:extLst>
+              <a:ext uri="{C183D7F6-B498-43B3-948B-1728B52AA6E4}">
+                <adec:decorative xmlns:adec="http://schemas.microsoft.com/office/drawing/2017/decorative" val="1"/>
+              </a:ext>
+            </a:extLst>
+          </p:cNvPr>
           <p:cNvSpPr/>
           <p:nvPr/>
         </p:nvSpPr>
@@ -9504,7 +9965,13 @@
       </p:sp>
       <p:sp>
         <p:nvSpPr>
-          <p:cNvPr id="5" name="Who col 1"/>
+          <p:cNvPr id="5" name="Who col 1" descr="">
+            <a:extLst>
+              <a:ext uri="{C183D7F6-B498-43B3-948B-1728B52AA6E4}">
+                <adec:decorative xmlns:adec="http://schemas.microsoft.com/office/drawing/2017/decorative" val="1"/>
+              </a:ext>
+            </a:extLst>
+          </p:cNvPr>
           <p:cNvSpPr/>
           <p:nvPr/>
         </p:nvSpPr>
@@ -9538,7 +10005,13 @@
       </p:sp>
       <p:sp>
         <p:nvSpPr>
-          <p:cNvPr id="6" name="Icon FaBuildingColumns"/>
+          <p:cNvPr id="6" name="Icon FaBuildingColumns" descr="">
+            <a:extLst>
+              <a:ext uri="{C183D7F6-B498-43B3-948B-1728B52AA6E4}">
+                <adec:decorative xmlns:adec="http://schemas.microsoft.com/office/drawing/2017/decorative" val="1"/>
+              </a:ext>
+            </a:extLst>
+          </p:cNvPr>
           <p:cNvSpPr/>
           <p:nvPr/>
         </p:nvSpPr>
@@ -9563,7 +10036,13 @@
       </p:sp>
       <p:pic>
         <p:nvPicPr>
-          <p:cNvPr id="7" name="Image 0" descr="C:\Users\whale\git\mwb-b06\presentations\_build\icons\FaBuildingColumns.png">    </p:cNvPr>
+          <p:cNvPr id="7" name="Image 0" descr="">
+            <a:extLst>
+              <a:ext uri="{C183D7F6-B498-43B3-948B-1728B52AA6E4}">
+                <adec:decorative xmlns:adec="http://schemas.microsoft.com/office/drawing/2017/decorative" val="1"/>
+              </a:ext>
+            </a:extLst>
+          </p:cNvPr>
           <p:cNvPicPr>
             <a:picLocks noChangeAspect="1"/>
           </p:cNvPicPr>
@@ -9750,7 +10229,13 @@
       </p:sp>
       <p:sp>
         <p:nvSpPr>
-          <p:cNvPr id="10" name="Who col 2"/>
+          <p:cNvPr id="10" name="Who col 2" descr="">
+            <a:extLst>
+              <a:ext uri="{C183D7F6-B498-43B3-948B-1728B52AA6E4}">
+                <adec:decorative xmlns:adec="http://schemas.microsoft.com/office/drawing/2017/decorative" val="1"/>
+              </a:ext>
+            </a:extLst>
+          </p:cNvPr>
           <p:cNvSpPr/>
           <p:nvPr/>
         </p:nvSpPr>
@@ -9784,7 +10269,13 @@
       </p:sp>
       <p:sp>
         <p:nvSpPr>
-          <p:cNvPr id="11" name="Icon FaUsersGear"/>
+          <p:cNvPr id="11" name="Icon FaUsersGear" descr="">
+            <a:extLst>
+              <a:ext uri="{C183D7F6-B498-43B3-948B-1728B52AA6E4}">
+                <adec:decorative xmlns:adec="http://schemas.microsoft.com/office/drawing/2017/decorative" val="1"/>
+              </a:ext>
+            </a:extLst>
+          </p:cNvPr>
           <p:cNvSpPr/>
           <p:nvPr/>
         </p:nvSpPr>
@@ -9809,7 +10300,13 @@
       </p:sp>
       <p:pic>
         <p:nvPicPr>
-          <p:cNvPr id="12" name="Image 1" descr="C:\Users\whale\git\mwb-b06\presentations\_build\icons\FaUsersGear.png">    </p:cNvPr>
+          <p:cNvPr id="12" name="Image 1" descr="">
+            <a:extLst>
+              <a:ext uri="{C183D7F6-B498-43B3-948B-1728B52AA6E4}">
+                <adec:decorative xmlns:adec="http://schemas.microsoft.com/office/drawing/2017/decorative" val="1"/>
+              </a:ext>
+            </a:extLst>
+          </p:cNvPr>
           <p:cNvPicPr>
             <a:picLocks noChangeAspect="1"/>
           </p:cNvPicPr>
@@ -9996,7 +10493,13 @@
       </p:sp>
       <p:sp>
         <p:nvSpPr>
-          <p:cNvPr id="15" name="Who col 3"/>
+          <p:cNvPr id="15" name="Who col 3" descr="">
+            <a:extLst>
+              <a:ext uri="{C183D7F6-B498-43B3-948B-1728B52AA6E4}">
+                <adec:decorative xmlns:adec="http://schemas.microsoft.com/office/drawing/2017/decorative" val="1"/>
+              </a:ext>
+            </a:extLst>
+          </p:cNvPr>
           <p:cNvSpPr/>
           <p:nvPr/>
         </p:nvSpPr>
@@ -10030,7 +10533,13 @@
       </p:sp>
       <p:sp>
         <p:nvSpPr>
-          <p:cNvPr id="16" name="Icon FaPeopleArrows"/>
+          <p:cNvPr id="16" name="Icon FaPeopleArrows" descr="">
+            <a:extLst>
+              <a:ext uri="{C183D7F6-B498-43B3-948B-1728B52AA6E4}">
+                <adec:decorative xmlns:adec="http://schemas.microsoft.com/office/drawing/2017/decorative" val="1"/>
+              </a:ext>
+            </a:extLst>
+          </p:cNvPr>
           <p:cNvSpPr/>
           <p:nvPr/>
         </p:nvSpPr>
@@ -10055,7 +10564,13 @@
       </p:sp>
       <p:pic>
         <p:nvPicPr>
-          <p:cNvPr id="17" name="Image 2" descr="C:\Users\whale\git\mwb-b06\presentations\_build\icons\FaPeopleArrows.png">    </p:cNvPr>
+          <p:cNvPr id="17" name="Image 2" descr="">
+            <a:extLst>
+              <a:ext uri="{C183D7F6-B498-43B3-948B-1728B52AA6E4}">
+                <adec:decorative xmlns:adec="http://schemas.microsoft.com/office/drawing/2017/decorative" val="1"/>
+              </a:ext>
+            </a:extLst>
+          </p:cNvPr>
           <p:cNvPicPr>
             <a:picLocks noChangeAspect="1"/>
           </p:cNvPicPr>
@@ -10242,7 +10757,13 @@
       </p:sp>
       <p:sp>
         <p:nvSpPr>
-          <p:cNvPr id="20" name="Hidden"/>
+          <p:cNvPr id="20" name="Hidden" descr="">
+            <a:extLst>
+              <a:ext uri="{C183D7F6-B498-43B3-948B-1728B52AA6E4}">
+                <adec:decorative xmlns:adec="http://schemas.microsoft.com/office/drawing/2017/decorative" val="1"/>
+              </a:ext>
+            </a:extLst>
+          </p:cNvPr>
           <p:cNvSpPr/>
           <p:nvPr/>
         </p:nvSpPr>
@@ -10276,7 +10797,13 @@
       </p:sp>
       <p:sp>
         <p:nvSpPr>
-          <p:cNvPr id="21" name="Icon FaTriangleExclamation"/>
+          <p:cNvPr id="21" name="Icon FaTriangleExclamation" descr="">
+            <a:extLst>
+              <a:ext uri="{C183D7F6-B498-43B3-948B-1728B52AA6E4}">
+                <adec:decorative xmlns:adec="http://schemas.microsoft.com/office/drawing/2017/decorative" val="1"/>
+              </a:ext>
+            </a:extLst>
+          </p:cNvPr>
           <p:cNvSpPr/>
           <p:nvPr/>
         </p:nvSpPr>
@@ -10301,7 +10828,13 @@
       </p:sp>
       <p:pic>
         <p:nvPicPr>
-          <p:cNvPr id="22" name="Image 3" descr="C:\Users\whale\git\mwb-b06\presentations\_build\icons\FaTriangleExclamation.png">    </p:cNvPr>
+          <p:cNvPr id="22" name="Image 3" descr="">
+            <a:extLst>
+              <a:ext uri="{C183D7F6-B498-43B3-948B-1728B52AA6E4}">
+                <adec:decorative xmlns:adec="http://schemas.microsoft.com/office/drawing/2017/decorative" val="1"/>
+              </a:ext>
+            </a:extLst>
+          </p:cNvPr>
           <p:cNvPicPr>
             <a:picLocks noChangeAspect="1"/>
           </p:cNvPicPr>
@@ -10519,7 +11052,13 @@
       </p:sp>
       <p:sp>
         <p:nvSpPr>
-          <p:cNvPr id="3" name="Tag How"/>
+          <p:cNvPr id="3" name="Tag How" descr="">
+            <a:extLst>
+              <a:ext uri="{C183D7F6-B498-43B3-948B-1728B52AA6E4}">
+                <adec:decorative xmlns:adec="http://schemas.microsoft.com/office/drawing/2017/decorative" val="1"/>
+              </a:ext>
+            </a:extLst>
+          </p:cNvPr>
           <p:cNvSpPr/>
           <p:nvPr/>
         </p:nvSpPr>
@@ -10582,7 +11121,13 @@
       </p:sp>
       <p:sp>
         <p:nvSpPr>
-          <p:cNvPr id="5" name="Ph 0"/>
+          <p:cNvPr id="5" name="Ph 0" descr="">
+            <a:extLst>
+              <a:ext uri="{C183D7F6-B498-43B3-948B-1728B52AA6E4}">
+                <adec:decorative xmlns:adec="http://schemas.microsoft.com/office/drawing/2017/decorative" val="1"/>
+              </a:ext>
+            </a:extLst>
+          </p:cNvPr>
           <p:cNvSpPr/>
           <p:nvPr/>
         </p:nvSpPr>
@@ -10683,7 +11228,13 @@
       </p:sp>
       <p:sp>
         <p:nvSpPr>
-          <p:cNvPr id="7" name="Ph 1"/>
+          <p:cNvPr id="7" name="Ph 1" descr="">
+            <a:extLst>
+              <a:ext uri="{C183D7F6-B498-43B3-948B-1728B52AA6E4}">
+                <adec:decorative xmlns:adec="http://schemas.microsoft.com/office/drawing/2017/decorative" val="1"/>
+              </a:ext>
+            </a:extLst>
+          </p:cNvPr>
           <p:cNvSpPr/>
           <p:nvPr/>
         </p:nvSpPr>
@@ -10784,7 +11335,13 @@
       </p:sp>
       <p:sp>
         <p:nvSpPr>
-          <p:cNvPr id="9" name="Ph 2"/>
+          <p:cNvPr id="9" name="Ph 2" descr="">
+            <a:extLst>
+              <a:ext uri="{C183D7F6-B498-43B3-948B-1728B52AA6E4}">
+                <adec:decorative xmlns:adec="http://schemas.microsoft.com/office/drawing/2017/decorative" val="1"/>
+              </a:ext>
+            </a:extLst>
+          </p:cNvPr>
           <p:cNvSpPr/>
           <p:nvPr/>
         </p:nvSpPr>
@@ -10961,7 +11518,13 @@
       </p:sp>
       <p:sp>
         <p:nvSpPr>
-          <p:cNvPr id="12" name="Moved"/>
+          <p:cNvPr id="12" name="Moved" descr="">
+            <a:extLst>
+              <a:ext uri="{C183D7F6-B498-43B3-948B-1728B52AA6E4}">
+                <adec:decorative xmlns:adec="http://schemas.microsoft.com/office/drawing/2017/decorative" val="1"/>
+              </a:ext>
+            </a:extLst>
+          </p:cNvPr>
           <p:cNvSpPr/>
           <p:nvPr/>
         </p:nvSpPr>
@@ -10995,7 +11558,13 @@
       </p:sp>
       <p:sp>
         <p:nvSpPr>
-          <p:cNvPr id="13" name="Icon FaRightLeft"/>
+          <p:cNvPr id="13" name="Icon FaRightLeft" descr="">
+            <a:extLst>
+              <a:ext uri="{C183D7F6-B498-43B3-948B-1728B52AA6E4}">
+                <adec:decorative xmlns:adec="http://schemas.microsoft.com/office/drawing/2017/decorative" val="1"/>
+              </a:ext>
+            </a:extLst>
+          </p:cNvPr>
           <p:cNvSpPr/>
           <p:nvPr/>
         </p:nvSpPr>
@@ -11020,7 +11589,13 @@
       </p:sp>
       <p:pic>
         <p:nvPicPr>
-          <p:cNvPr id="14" name="Image 0" descr="C:\Users\whale\git\mwb-b06\presentations\_build\icons\FaRightLeft.png">    </p:cNvPr>
+          <p:cNvPr id="14" name="Image 0" descr="">
+            <a:extLst>
+              <a:ext uri="{C183D7F6-B498-43B3-948B-1728B52AA6E4}">
+                <adec:decorative xmlns:adec="http://schemas.microsoft.com/office/drawing/2017/decorative" val="1"/>
+              </a:ext>
+            </a:extLst>
+          </p:cNvPr>
           <p:cNvPicPr>
             <a:picLocks noChangeAspect="1"/>
           </p:cNvPicPr>
@@ -11238,7 +11813,13 @@
       </p:sp>
       <p:sp>
         <p:nvSpPr>
-          <p:cNvPr id="3" name="Tag How"/>
+          <p:cNvPr id="3" name="Tag How" descr="">
+            <a:extLst>
+              <a:ext uri="{C183D7F6-B498-43B3-948B-1728B52AA6E4}">
+                <adec:decorative xmlns:adec="http://schemas.microsoft.com/office/drawing/2017/decorative" val="1"/>
+              </a:ext>
+            </a:extLst>
+          </p:cNvPr>
           <p:cNvSpPr/>
           <p:nvPr/>
         </p:nvSpPr>
@@ -11301,7 +11882,13 @@
       </p:sp>
       <p:sp>
         <p:nvSpPr>
-          <p:cNvPr id="5" name="Col 0"/>
+          <p:cNvPr id="5" name="Col 0" descr="">
+            <a:extLst>
+              <a:ext uri="{C183D7F6-B498-43B3-948B-1728B52AA6E4}">
+                <adec:decorative xmlns:adec="http://schemas.microsoft.com/office/drawing/2017/decorative" val="1"/>
+              </a:ext>
+            </a:extLst>
+          </p:cNvPr>
           <p:cNvSpPr/>
           <p:nvPr/>
         </p:nvSpPr>
@@ -11335,7 +11922,13 @@
       </p:sp>
       <p:sp>
         <p:nvSpPr>
-          <p:cNvPr id="6" name="Icon FaUsersGear"/>
+          <p:cNvPr id="6" name="Icon FaUsersGear" descr="">
+            <a:extLst>
+              <a:ext uri="{C183D7F6-B498-43B3-948B-1728B52AA6E4}">
+                <adec:decorative xmlns:adec="http://schemas.microsoft.com/office/drawing/2017/decorative" val="1"/>
+              </a:ext>
+            </a:extLst>
+          </p:cNvPr>
           <p:cNvSpPr/>
           <p:nvPr/>
         </p:nvSpPr>
@@ -11360,7 +11953,13 @@
       </p:sp>
       <p:pic>
         <p:nvPicPr>
-          <p:cNvPr id="7" name="Image 0" descr="C:\Users\whale\git\mwb-b06\presentations\_build\icons\FaUsersGear.png">    </p:cNvPr>
+          <p:cNvPr id="7" name="Image 0" descr="">
+            <a:extLst>
+              <a:ext uri="{C183D7F6-B498-43B3-948B-1728B52AA6E4}">
+                <adec:decorative xmlns:adec="http://schemas.microsoft.com/office/drawing/2017/decorative" val="1"/>
+              </a:ext>
+            </a:extLst>
+          </p:cNvPr>
           <p:cNvPicPr>
             <a:picLocks noChangeAspect="1"/>
           </p:cNvPicPr>
@@ -11517,7 +12116,13 @@
       </p:sp>
       <p:sp>
         <p:nvSpPr>
-          <p:cNvPr id="10" name="Col 1"/>
+          <p:cNvPr id="10" name="Col 1" descr="">
+            <a:extLst>
+              <a:ext uri="{C183D7F6-B498-43B3-948B-1728B52AA6E4}">
+                <adec:decorative xmlns:adec="http://schemas.microsoft.com/office/drawing/2017/decorative" val="1"/>
+              </a:ext>
+            </a:extLst>
+          </p:cNvPr>
           <p:cNvSpPr/>
           <p:nvPr/>
         </p:nvSpPr>
@@ -11551,7 +12156,13 @@
       </p:sp>
       <p:sp>
         <p:nvSpPr>
-          <p:cNvPr id="11" name="Icon FaCubes"/>
+          <p:cNvPr id="11" name="Icon FaCubes" descr="">
+            <a:extLst>
+              <a:ext uri="{C183D7F6-B498-43B3-948B-1728B52AA6E4}">
+                <adec:decorative xmlns:adec="http://schemas.microsoft.com/office/drawing/2017/decorative" val="1"/>
+              </a:ext>
+            </a:extLst>
+          </p:cNvPr>
           <p:cNvSpPr/>
           <p:nvPr/>
         </p:nvSpPr>
@@ -11576,7 +12187,13 @@
       </p:sp>
       <p:pic>
         <p:nvPicPr>
-          <p:cNvPr id="12" name="Image 1" descr="C:\Users\whale\git\mwb-b06\presentations\_build\icons\FaCubes.png">    </p:cNvPr>
+          <p:cNvPr id="12" name="Image 1" descr="">
+            <a:extLst>
+              <a:ext uri="{C183D7F6-B498-43B3-948B-1728B52AA6E4}">
+                <adec:decorative xmlns:adec="http://schemas.microsoft.com/office/drawing/2017/decorative" val="1"/>
+              </a:ext>
+            </a:extLst>
+          </p:cNvPr>
           <p:cNvPicPr>
             <a:picLocks noChangeAspect="1"/>
           </p:cNvPicPr>
@@ -11733,7 +12350,13 @@
       </p:sp>
       <p:sp>
         <p:nvSpPr>
-          <p:cNvPr id="15" name="Last mile"/>
+          <p:cNvPr id="15" name="Last mile" descr="">
+            <a:extLst>
+              <a:ext uri="{C183D7F6-B498-43B3-948B-1728B52AA6E4}">
+                <adec:decorative xmlns:adec="http://schemas.microsoft.com/office/drawing/2017/decorative" val="1"/>
+              </a:ext>
+            </a:extLst>
+          </p:cNvPr>
           <p:cNvSpPr/>
           <p:nvPr/>
         </p:nvSpPr>
@@ -11767,7 +12390,13 @@
       </p:sp>
       <p:sp>
         <p:nvSpPr>
-          <p:cNvPr id="16" name="Icon FaRoute"/>
+          <p:cNvPr id="16" name="Icon FaRoute" descr="">
+            <a:extLst>
+              <a:ext uri="{C183D7F6-B498-43B3-948B-1728B52AA6E4}">
+                <adec:decorative xmlns:adec="http://schemas.microsoft.com/office/drawing/2017/decorative" val="1"/>
+              </a:ext>
+            </a:extLst>
+          </p:cNvPr>
           <p:cNvSpPr/>
           <p:nvPr/>
         </p:nvSpPr>
@@ -11792,7 +12421,13 @@
       </p:sp>
       <p:pic>
         <p:nvPicPr>
-          <p:cNvPr id="17" name="Image 2" descr="C:\Users\whale\git\mwb-b06\presentations\_build\icons\FaRoute.png">    </p:cNvPr>
+          <p:cNvPr id="17" name="Image 2" descr="">
+            <a:extLst>
+              <a:ext uri="{C183D7F6-B498-43B3-948B-1728B52AA6E4}">
+                <adec:decorative xmlns:adec="http://schemas.microsoft.com/office/drawing/2017/decorative" val="1"/>
+              </a:ext>
+            </a:extLst>
+          </p:cNvPr>
           <p:cNvPicPr>
             <a:picLocks noChangeAspect="1"/>
           </p:cNvPicPr>
@@ -11951,9 +12586,9 @@
 </file>
 
 <file path=ppt/theme/theme1.xml><?xml version="1.0" encoding="utf-8"?>
-<a:theme xmlns:a="http://schemas.openxmlformats.org/drawingml/2006/main" name="Modernization Workbook">
+<a:theme xmlns:a="http://schemas.openxmlformats.org/drawingml/2006/main" name="Federal Modernization Workbook">
   <a:themeElements>
-    <a:clrScheme name="Modernization Workbook">
+    <a:clrScheme name="Federal Modernization Workbook">
       <a:dk1>
         <a:srgbClr val="1F2A44"/>
       </a:dk1>
@@ -11991,7 +12626,7 @@
         <a:srgbClr val="334155"/>
       </a:folHlink>
     </a:clrScheme>
-    <a:fontScheme name="Modernization Workbook">
+    <a:fontScheme name="Federal Modernization Workbook">
       <a:majorFont>
         <a:latin typeface="Cambria"/>
         <a:ea typeface=""/>
